--- a/docs/samples/team-brief-board-sample.pptx
+++ b/docs/samples/team-brief-board-sample.pptx
@@ -395,7 +395,7 @@
             <c:idx val="7"/>
             <c:spPr>
               <a:solidFill>
-                <a:srgbClr val="B5893B"/>
+                <a:srgbClr val="B9781A"/>
               </a:solidFill>
             </c:spPr>
           </c:dPt>
@@ -656,7 +656,7 @@
           </c:tx>
           <c:spPr>
             <a:solidFill>
-              <a:srgbClr val="B5893B"/>
+              <a:srgbClr val="B9781A"/>
             </a:solidFill>
           </c:spPr>
           <c:cat>
@@ -838,7 +838,7 @@
             <c:idx val="7"/>
             <c:spPr>
               <a:solidFill>
-                <a:srgbClr val="B5893B"/>
+                <a:srgbClr val="B9781A"/>
               </a:solidFill>
             </c:spPr>
           </c:dPt>
@@ -1718,6 +1718,11 @@
           </a:p>
           <a:p>
             <a:r>
+              <a:t>- White City: Grade A vacancy 11.5% against 17.9% overall, gap widening: New and refurbished space in White City is 11.5% vacant against 17.9% for all space in Q2 2026, a gap of 6.4pp (from 5.0pp the quarter before). [1]</a:t>
+            </a:r>
+          </a:p>
+          <a:p>
+            <a:r>
               <a:t>- Barclays buys 1 Churchill Place, Canary Wharf, for £750m: Barclays has acquired its Canary Wharf headquarters at 1 Churchill Place for £750m, reflecting a 5.62% yield. The deal lifted Docklands &amp; Stratford investment turnover to £0.75bn in Q2 2026. [10]</a:t>
             </a:r>
           </a:p>
@@ -1739,11 +1744,6 @@
           <a:p>
             <a:r>
               <a:t>- 540,000 sq ft speculative scheme due Q4 2027 in Rest of Docklands: One North Quay, E14 (540,000 sq ft) is under construction without a pre-let and is expected to complete in Q4 2027. [6]</a:t>
-            </a:r>
-          </a:p>
-          <a:p>
-            <a:r>
-              <a:t>- Q4 2025 London office investment hits £3.3bn, best quarter since Q1 2022: London office investment reached £3.3bn in Q4 2025 with a further £3.1bn under offer, the strongest quarter since Q1 2022. [11]</a:t>
             </a:r>
           </a:p>
         </p:txBody>
@@ -1914,7 +1914,7 @@
           <a:noFill/>
           <a:ln w="25400">
             <a:solidFill>
-              <a:srgbClr val="B5893B"/>
+              <a:srgbClr val="B9781A"/>
             </a:solidFill>
             <a:prstDash val="solid"/>
           </a:ln>
@@ -1946,7 +1946,7 @@
               <a:buNone/>
               <a:defRPr lang="en-US" sz="1000" b="1" spc="300" kern="0" dirty="0">
                 <a:solidFill>
-                  <a:srgbClr val="B5893B"/>
+                  <a:srgbClr val="B9781A"/>
                 </a:solidFill>
                 <a:latin typeface="Calibri" pitchFamily="34" charset="0"/>
                 <a:ea typeface="Calibri" pitchFamily="34" charset="-122"/>
@@ -2093,7 +2093,7 @@
             <a:r>
               <a:rPr lang="en-US" sz="4800" b="1" i="1" dirty="0">
                 <a:solidFill>
-                  <a:srgbClr val="B5893B"/>
+                  <a:srgbClr val="B9781A"/>
                 </a:solidFill>
                 <a:latin typeface="Cambria" pitchFamily="34" charset="0"/>
                 <a:ea typeface="Cambria" pitchFamily="34" charset="-122"/>
@@ -2239,7 +2239,7 @@
             <a:r>
               <a:rPr lang="en-US" sz="4800" b="1" i="1" dirty="0">
                 <a:solidFill>
-                  <a:srgbClr val="B5893B"/>
+                  <a:srgbClr val="B9781A"/>
                 </a:solidFill>
                 <a:latin typeface="Cambria" pitchFamily="34" charset="0"/>
                 <a:ea typeface="Cambria" pitchFamily="34" charset="-122"/>
@@ -2385,7 +2385,7 @@
             <a:r>
               <a:rPr lang="en-US" sz="4800" b="1" i="1" dirty="0">
                 <a:solidFill>
-                  <a:srgbClr val="B5893B"/>
+                  <a:srgbClr val="B9781A"/>
                 </a:solidFill>
                 <a:latin typeface="Cambria" pitchFamily="34" charset="0"/>
                 <a:ea typeface="Cambria" pitchFamily="34" charset="-122"/>
@@ -2601,7 +2601,7 @@
           <a:noFill/>
           <a:ln w="25400">
             <a:solidFill>
-              <a:srgbClr val="B5893B"/>
+              <a:srgbClr val="B9781A"/>
             </a:solidFill>
             <a:prstDash val="solid"/>
           </a:ln>
@@ -2633,7 +2633,7 @@
               <a:buNone/>
               <a:defRPr lang="en-US" sz="1000" b="1" spc="300" kern="0" dirty="0">
                 <a:solidFill>
-                  <a:srgbClr val="B5893B"/>
+                  <a:srgbClr val="B9781A"/>
                 </a:solidFill>
                 <a:latin typeface="Calibri" pitchFamily="34" charset="0"/>
                 <a:ea typeface="Calibri" pitchFamily="34" charset="-122"/>
@@ -2779,7 +2779,7 @@
               <a:buNone/>
               <a:defRPr lang="en-US" sz="1100" b="1" spc="200" kern="0" dirty="0">
                 <a:solidFill>
-                  <a:srgbClr val="B5893B"/>
+                  <a:srgbClr val="B9781A"/>
                 </a:solidFill>
                 <a:latin typeface="Calibri" pitchFamily="34" charset="0"/>
                 <a:ea typeface="Calibri" pitchFamily="34" charset="-122"/>
@@ -2905,7 +2905,7 @@
               <a:buNone/>
               <a:defRPr lang="en-US" sz="1100" b="1" spc="200" kern="0" dirty="0">
                 <a:solidFill>
-                  <a:srgbClr val="B5893B"/>
+                  <a:srgbClr val="B9781A"/>
                 </a:solidFill>
                 <a:latin typeface="Calibri" pitchFamily="34" charset="0"/>
                 <a:ea typeface="Calibri" pitchFamily="34" charset="-122"/>
@@ -3031,7 +3031,7 @@
               <a:buNone/>
               <a:defRPr lang="en-US" sz="1100" b="1" spc="200" kern="0" dirty="0">
                 <a:solidFill>
-                  <a:srgbClr val="B5893B"/>
+                  <a:srgbClr val="B9781A"/>
                 </a:solidFill>
                 <a:latin typeface="Calibri" pitchFamily="34" charset="0"/>
                 <a:ea typeface="Calibri" pitchFamily="34" charset="-122"/>
@@ -3157,7 +3157,7 @@
               <a:buNone/>
               <a:defRPr lang="en-US" sz="1100" b="1" spc="200" kern="0" dirty="0">
                 <a:solidFill>
-                  <a:srgbClr val="B5893B"/>
+                  <a:srgbClr val="B9781A"/>
                 </a:solidFill>
                 <a:latin typeface="Calibri" pitchFamily="34" charset="0"/>
                 <a:ea typeface="Calibri" pitchFamily="34" charset="-122"/>
@@ -3283,7 +3283,7 @@
               <a:buNone/>
               <a:defRPr lang="en-US" sz="1100" b="1" spc="200" kern="0" dirty="0">
                 <a:solidFill>
-                  <a:srgbClr val="B5893B"/>
+                  <a:srgbClr val="B9781A"/>
                 </a:solidFill>
                 <a:latin typeface="Calibri" pitchFamily="34" charset="0"/>
                 <a:ea typeface="Calibri" pitchFamily="34" charset="-122"/>
@@ -3480,7 +3480,7 @@
           <a:noFill/>
           <a:ln w="25400">
             <a:solidFill>
-              <a:srgbClr val="B5893B"/>
+              <a:srgbClr val="B9781A"/>
             </a:solidFill>
             <a:prstDash val="solid"/>
           </a:ln>
@@ -3512,7 +3512,7 @@
               <a:buNone/>
               <a:defRPr lang="en-US" sz="1000" b="1" spc="300" kern="0" dirty="0">
                 <a:solidFill>
-                  <a:srgbClr val="B5893B"/>
+                  <a:srgbClr val="B9781A"/>
                 </a:solidFill>
                 <a:latin typeface="Calibri" pitchFamily="34" charset="0"/>
                 <a:ea typeface="Calibri" pitchFamily="34" charset="-122"/>
@@ -4173,7 +4173,7 @@
           <a:noFill/>
           <a:ln w="25400">
             <a:solidFill>
-              <a:srgbClr val="B5893B"/>
+              <a:srgbClr val="B9781A"/>
             </a:solidFill>
             <a:prstDash val="solid"/>
           </a:ln>
@@ -4205,7 +4205,7 @@
               <a:buNone/>
               <a:defRPr lang="en-US" sz="1000" b="1" spc="300" kern="0" dirty="0">
                 <a:solidFill>
-                  <a:srgbClr val="B5893B"/>
+                  <a:srgbClr val="B9781A"/>
                 </a:solidFill>
                 <a:latin typeface="Calibri" pitchFamily="34" charset="0"/>
                 <a:ea typeface="Calibri" pitchFamily="34" charset="-122"/>
@@ -4464,7 +4464,7 @@
           <a:noFill/>
           <a:ln w="25400">
             <a:solidFill>
-              <a:srgbClr val="B5893B"/>
+              <a:srgbClr val="B9781A"/>
             </a:solidFill>
             <a:prstDash val="solid"/>
           </a:ln>
@@ -4496,7 +4496,7 @@
               <a:buNone/>
               <a:defRPr lang="en-US" sz="1000" b="1" spc="300" kern="0" dirty="0">
                 <a:solidFill>
-                  <a:srgbClr val="B5893B"/>
+                  <a:srgbClr val="B9781A"/>
                 </a:solidFill>
                 <a:latin typeface="Calibri" pitchFamily="34" charset="0"/>
                 <a:ea typeface="Calibri" pitchFamily="34" charset="-122"/>
@@ -4678,7 +4678,7 @@
     <p:bg>
       <p:bgPr>
         <a:solidFill>
-          <a:srgbClr val="14213D"/>
+          <a:srgbClr val="1B3A5C"/>
         </a:solidFill>
       </p:bgPr>
     </p:bg>
@@ -4722,7 +4722,7 @@
               <a:buNone/>
               <a:defRPr lang="en-US" sz="1000" b="1" spc="300" kern="0" dirty="0">
                 <a:solidFill>
-                  <a:srgbClr val="B5893B"/>
+                  <a:srgbClr val="B9781A"/>
                 </a:solidFill>
                 <a:latin typeface="Calibri" pitchFamily="34" charset="0"/>
                 <a:ea typeface="Calibri" pitchFamily="34" charset="-122"/>
@@ -4881,7 +4881,7 @@
           <a:noFill/>
           <a:ln w="38100">
             <a:solidFill>
-              <a:srgbClr val="B5893B"/>
+              <a:srgbClr val="B9781A"/>
             </a:solidFill>
             <a:prstDash val="solid"/>
           </a:ln>
@@ -4946,7 +4946,7 @@
           <a:noFill/>
           <a:ln w="38100">
             <a:solidFill>
-              <a:srgbClr val="B5893B"/>
+              <a:srgbClr val="B9781A"/>
             </a:solidFill>
             <a:prstDash val="solid"/>
           </a:ln>
@@ -5011,7 +5011,7 @@
           <a:noFill/>
           <a:ln w="38100">
             <a:solidFill>
-              <a:srgbClr val="B5893B"/>
+              <a:srgbClr val="B9781A"/>
             </a:solidFill>
             <a:prstDash val="solid"/>
           </a:ln>
@@ -5076,7 +5076,7 @@
           <a:noFill/>
           <a:ln w="38100">
             <a:solidFill>
-              <a:srgbClr val="B5893B"/>
+              <a:srgbClr val="B9781A"/>
             </a:solidFill>
             <a:prstDash val="solid"/>
           </a:ln>
@@ -5180,7 +5180,7 @@
     <p:bg>
       <p:bgPr>
         <a:solidFill>
-          <a:srgbClr val="14213D"/>
+          <a:srgbClr val="1B3A5C"/>
         </a:solidFill>
       </p:bgPr>
     </p:bg>
@@ -5215,7 +5215,7 @@
           <a:noFill/>
           <a:ln w="38100">
             <a:solidFill>
-              <a:srgbClr val="B5893B"/>
+              <a:srgbClr val="B9781A"/>
             </a:solidFill>
             <a:prstDash val="solid"/>
           </a:ln>
@@ -5247,7 +5247,7 @@
               <a:buNone/>
               <a:defRPr lang="en-US" sz="1000" b="1" spc="300" kern="0" dirty="0">
                 <a:solidFill>
-                  <a:srgbClr val="B5893B"/>
+                  <a:srgbClr val="B9781A"/>
                 </a:solidFill>
                 <a:latin typeface="Calibri" pitchFamily="34" charset="0"/>
                 <a:ea typeface="Calibri" pitchFamily="34" charset="-122"/>
@@ -5361,7 +5361,7 @@
     <p:bg>
       <p:bgPr>
         <a:solidFill>
-          <a:srgbClr val="14213D"/>
+          <a:srgbClr val="1B3A5C"/>
         </a:solidFill>
       </p:bgPr>
     </p:bg>
@@ -5405,7 +5405,7 @@
               <a:buNone/>
               <a:defRPr lang="en-US" sz="1000" b="1" spc="300" kern="0" dirty="0">
                 <a:solidFill>
-                  <a:srgbClr val="B5893B"/>
+                  <a:srgbClr val="B9781A"/>
                 </a:solidFill>
                 <a:latin typeface="Calibri" pitchFamily="34" charset="0"/>
                 <a:ea typeface="Calibri" pitchFamily="34" charset="-122"/>
@@ -5438,7 +5438,7 @@
           <a:noFill/>
           <a:ln w="38100">
             <a:solidFill>
-              <a:srgbClr val="B5893B"/>
+              <a:srgbClr val="B9781A"/>
             </a:solidFill>
             <a:prstDash val="solid"/>
           </a:ln>
@@ -5616,7 +5616,7 @@
           <a:noFill/>
           <a:ln w="25400">
             <a:solidFill>
-              <a:srgbClr val="B5893B"/>
+              <a:srgbClr val="B9781A"/>
             </a:solidFill>
             <a:prstDash val="solid"/>
           </a:ln>
@@ -5648,7 +5648,7 @@
               <a:buNone/>
               <a:defRPr lang="en-US" sz="1000" b="1" spc="300" kern="0" dirty="0">
                 <a:solidFill>
-                  <a:srgbClr val="B5893B"/>
+                  <a:srgbClr val="B9781A"/>
                 </a:solidFill>
                 <a:latin typeface="Calibri" pitchFamily="34" charset="0"/>
                 <a:ea typeface="Calibri" pitchFamily="34" charset="-122"/>
@@ -5794,7 +5794,7 @@
               <a:buNone/>
               <a:defRPr lang="en-US" sz="6000" b="1" i="1" dirty="0">
                 <a:solidFill>
-                  <a:srgbClr val="B5893B"/>
+                  <a:srgbClr val="B9781A"/>
                 </a:solidFill>
                 <a:latin typeface="Cambria" pitchFamily="34" charset="0"/>
                 <a:ea typeface="Cambria" pitchFamily="34" charset="-122"/>
@@ -6117,7 +6117,7 @@
           <a:noFill/>
           <a:ln w="25400">
             <a:solidFill>
-              <a:srgbClr val="B5893B"/>
+              <a:srgbClr val="B9781A"/>
             </a:solidFill>
             <a:prstDash val="solid"/>
           </a:ln>
@@ -6149,7 +6149,7 @@
               <a:buNone/>
               <a:defRPr lang="en-US" sz="1000" b="1" spc="300" kern="0" dirty="0">
                 <a:solidFill>
-                  <a:srgbClr val="B5893B"/>
+                  <a:srgbClr val="B9781A"/>
                 </a:solidFill>
                 <a:latin typeface="Calibri" pitchFamily="34" charset="0"/>
                 <a:ea typeface="Calibri" pitchFamily="34" charset="-122"/>
@@ -6286,7 +6286,7 @@
           <a:noFill/>
           <a:ln w="19050">
             <a:solidFill>
-              <a:srgbClr val="B5893B"/>
+              <a:srgbClr val="B9781A"/>
             </a:solidFill>
             <a:prstDash val="solid"/>
           </a:ln>
@@ -6318,7 +6318,7 @@
               <a:buNone/>
               <a:defRPr lang="en-US" sz="3000" b="1" i="1" dirty="0">
                 <a:solidFill>
-                  <a:srgbClr val="B5893B"/>
+                  <a:srgbClr val="B9781A"/>
                 </a:solidFill>
                 <a:latin typeface="Cambria" pitchFamily="34" charset="0"/>
                 <a:ea typeface="Cambria" pitchFamily="34" charset="-122"/>
@@ -6435,7 +6435,7 @@
           <a:noFill/>
           <a:ln w="19050">
             <a:solidFill>
-              <a:srgbClr val="B5893B"/>
+              <a:srgbClr val="B9781A"/>
             </a:solidFill>
             <a:prstDash val="solid"/>
           </a:ln>
@@ -6467,7 +6467,7 @@
               <a:buNone/>
               <a:defRPr lang="en-US" sz="3000" b="1" i="1" dirty="0">
                 <a:solidFill>
-                  <a:srgbClr val="B5893B"/>
+                  <a:srgbClr val="B9781A"/>
                 </a:solidFill>
                 <a:latin typeface="Cambria" pitchFamily="34" charset="0"/>
                 <a:ea typeface="Cambria" pitchFamily="34" charset="-122"/>
@@ -6584,7 +6584,7 @@
           <a:noFill/>
           <a:ln w="19050">
             <a:solidFill>
-              <a:srgbClr val="B5893B"/>
+              <a:srgbClr val="B9781A"/>
             </a:solidFill>
             <a:prstDash val="solid"/>
           </a:ln>
@@ -6616,7 +6616,7 @@
               <a:buNone/>
               <a:defRPr lang="en-US" sz="3000" b="1" i="1" dirty="0">
                 <a:solidFill>
-                  <a:srgbClr val="B5893B"/>
+                  <a:srgbClr val="B9781A"/>
                 </a:solidFill>
                 <a:latin typeface="Cambria" pitchFamily="34" charset="0"/>
                 <a:ea typeface="Cambria" pitchFamily="34" charset="-122"/>
@@ -6733,7 +6733,7 @@
           <a:noFill/>
           <a:ln w="19050">
             <a:solidFill>
-              <a:srgbClr val="B5893B"/>
+              <a:srgbClr val="B9781A"/>
             </a:solidFill>
             <a:prstDash val="solid"/>
           </a:ln>
@@ -6765,7 +6765,7 @@
               <a:buNone/>
               <a:defRPr lang="en-US" sz="3000" b="1" i="1" dirty="0">
                 <a:solidFill>
-                  <a:srgbClr val="B5893B"/>
+                  <a:srgbClr val="B9781A"/>
                 </a:solidFill>
                 <a:latin typeface="Cambria" pitchFamily="34" charset="0"/>
                 <a:ea typeface="Cambria" pitchFamily="34" charset="-122"/>
@@ -7088,7 +7088,7 @@
           <a:noFill/>
           <a:ln w="25400">
             <a:solidFill>
-              <a:srgbClr val="B5893B"/>
+              <a:srgbClr val="B9781A"/>
             </a:solidFill>
             <a:prstDash val="solid"/>
           </a:ln>
@@ -7120,7 +7120,7 @@
               <a:buNone/>
               <a:defRPr lang="en-US" sz="1000" b="1" spc="300" kern="0" dirty="0">
                 <a:solidFill>
-                  <a:srgbClr val="B5893B"/>
+                  <a:srgbClr val="B9781A"/>
                 </a:solidFill>
                 <a:latin typeface="Calibri" pitchFamily="34" charset="0"/>
                 <a:ea typeface="Calibri" pitchFamily="34" charset="-122"/>
@@ -7361,7 +7361,7 @@
           <a:noFill/>
           <a:ln w="38100">
             <a:solidFill>
-              <a:srgbClr val="B5893B"/>
+              <a:srgbClr val="B9781A"/>
             </a:solidFill>
             <a:prstDash val="solid"/>
           </a:ln>
@@ -7548,7 +7548,7 @@
           <a:noFill/>
           <a:ln w="25400">
             <a:solidFill>
-              <a:srgbClr val="B5893B"/>
+              <a:srgbClr val="B9781A"/>
             </a:solidFill>
             <a:prstDash val="solid"/>
           </a:ln>
@@ -7580,7 +7580,7 @@
               <a:buNone/>
               <a:defRPr lang="en-US" sz="1000" b="1" spc="300" kern="0" dirty="0">
                 <a:solidFill>
-                  <a:srgbClr val="B5893B"/>
+                  <a:srgbClr val="B9781A"/>
                 </a:solidFill>
                 <a:latin typeface="Calibri" pitchFamily="34" charset="0"/>
                 <a:ea typeface="Calibri" pitchFamily="34" charset="-122"/>
@@ -8007,7 +8007,7 @@
           <a:noFill/>
           <a:ln w="25400">
             <a:solidFill>
-              <a:srgbClr val="B5893B"/>
+              <a:srgbClr val="B9781A"/>
             </a:solidFill>
             <a:prstDash val="solid"/>
           </a:ln>
@@ -8039,7 +8039,7 @@
               <a:buNone/>
               <a:defRPr lang="en-US" sz="1000" b="1" spc="300" kern="0" dirty="0">
                 <a:solidFill>
-                  <a:srgbClr val="B5893B"/>
+                  <a:srgbClr val="B9781A"/>
                 </a:solidFill>
                 <a:latin typeface="Calibri" pitchFamily="34" charset="0"/>
                 <a:ea typeface="Calibri" pitchFamily="34" charset="-122"/>
@@ -8834,7 +8834,7 @@
           <a:p>
             <a:r>
               <a:rPr/>
-              <a:t>Top team signals (none added yet)</a:t>
+              <a:t>Board brief  ·  figures to Q2 2026  ·  10 Oct 2026</a:t>
             </a:r>
           </a:p>
         </p:txBody>
@@ -8913,6 +8913,14 @@
                   <a:srgbClr val="C9D1DE"/>
                 </a:solidFill>
               </a:rPr>
+              <a:t/>
+            </a:r>
+            <a:r>
+              <a:rPr sz="1000">
+                <a:solidFill>
+                  <a:srgbClr val="C9D1DE"/>
+                </a:solidFill>
+              </a:rPr>
               <a:t> [1]</a:t>
             </a:r>
           </a:p>
@@ -8968,6 +8976,14 @@
                   <a:srgbClr val="C9D1DE"/>
                 </a:solidFill>
               </a:rPr>
+              <a:t/>
+            </a:r>
+            <a:r>
+              <a:rPr sz="1000">
+                <a:solidFill>
+                  <a:srgbClr val="C9D1DE"/>
+                </a:solidFill>
+              </a:rPr>
               <a:t> [1]</a:t>
             </a:r>
           </a:p>
@@ -9023,6 +9039,14 @@
                   <a:srgbClr val="C9D1DE"/>
                 </a:solidFill>
               </a:rPr>
+              <a:t/>
+            </a:r>
+            <a:r>
+              <a:rPr sz="1000">
+                <a:solidFill>
+                  <a:srgbClr val="C9D1DE"/>
+                </a:solidFill>
+              </a:rPr>
               <a:t> [1]</a:t>
             </a:r>
           </a:p>
@@ -9071,6 +9095,14 @@
                 <a:latin typeface="Cambria"/>
               </a:rPr>
               <a:t>3.75%</a:t>
+            </a:r>
+            <a:r>
+              <a:rPr sz="1000">
+                <a:solidFill>
+                  <a:srgbClr val="C9D1DE"/>
+                </a:solidFill>
+              </a:rPr>
+              <a:t/>
             </a:r>
             <a:r>
               <a:rPr sz="1000">
@@ -9298,7 +9330,7 @@
             <a:avLst/>
           </a:prstGeom>
           <a:solidFill>
-            <a:srgbClr val="14213D"/>
+            <a:srgbClr val="1B3A5C"/>
           </a:solidFill>
           <a:ln>
             <a:noFill/>
@@ -9326,7 +9358,7 @@
             <a:r>
               <a:rPr sz="900" b="1">
                 <a:solidFill>
-                  <a:srgbClr val="B5893B"/>
+                  <a:srgbClr val="B9781A"/>
                 </a:solidFill>
               </a:rPr>
               <a:t>SO WHAT    </a:t>
@@ -9565,7 +9597,7 @@
                   </a:txBody>
                   <a:tcPr>
                     <a:solidFill>
-                      <a:srgbClr val="14213D"/>
+                      <a:srgbClr val="1B3A5C"/>
                     </a:solidFill>
                   </a:tcPr>
                 </a:tc>
@@ -9586,7 +9618,7 @@
                   </a:txBody>
                   <a:tcPr>
                     <a:solidFill>
-                      <a:srgbClr val="14213D"/>
+                      <a:srgbClr val="1B3A5C"/>
                     </a:solidFill>
                   </a:tcPr>
                 </a:tc>
@@ -9607,7 +9639,7 @@
                   </a:txBody>
                   <a:tcPr>
                     <a:solidFill>
-                      <a:srgbClr val="14213D"/>
+                      <a:srgbClr val="1B3A5C"/>
                     </a:solidFill>
                   </a:tcPr>
                 </a:tc>
@@ -9891,7 +9923,7 @@
             <a:avLst/>
           </a:prstGeom>
           <a:solidFill>
-            <a:srgbClr val="14213D"/>
+            <a:srgbClr val="1B3A5C"/>
           </a:solidFill>
           <a:ln>
             <a:noFill/>
@@ -9919,7 +9951,7 @@
             <a:r>
               <a:rPr sz="900" b="1">
                 <a:solidFill>
-                  <a:srgbClr val="B5893B"/>
+                  <a:srgbClr val="B9781A"/>
                 </a:solidFill>
               </a:rPr>
               <a:t>SO WHAT    </a:t>
@@ -10176,7 +10208,7 @@
             <a:avLst/>
           </a:prstGeom>
           <a:solidFill>
-            <a:srgbClr val="14213D"/>
+            <a:srgbClr val="1B3A5C"/>
           </a:solidFill>
           <a:ln>
             <a:noFill/>
@@ -10204,7 +10236,7 @@
             <a:r>
               <a:rPr sz="900" b="1">
                 <a:solidFill>
-                  <a:srgbClr val="B5893B"/>
+                  <a:srgbClr val="B9781A"/>
                 </a:solidFill>
               </a:rPr>
               <a:t>SO WHAT    </a:t>
@@ -10342,7 +10374,7 @@
             <a:r>
               <a:rPr sz="900">
                 <a:solidFill>
-                  <a:srgbClr val="A8322A"/>
+                  <a:srgbClr val="B4452E"/>
                 </a:solidFill>
               </a:rPr>
               <a:t/>
@@ -10356,13 +10388,13 @@
                 </a:solidFill>
                 <a:latin typeface="Cambria"/>
               </a:rPr>
-              <a:t>Barclays buys 1 Churchill Place, Canary Wharf, for £750m</a:t>
+              <a:t>White City: Grade A vacancy 11.5% against 17.9% overall, gap widening</a:t>
             </a:r>
           </a:p>
           <a:p>
             <a:r>
               <a:rPr sz="900"/>
-              <a:t>Barclays has acquired its Canary Wharf headquarters at 1 Churchill Place for £750m, reflecting a 5.62% yield. The deal lifted Docklands &amp; Stratford investment turnover to… [10]</a:t>
+              <a:t>New and refurbished space in White City is 11.5% vacant against 17.9% for all space in Q2 2026, a gap of 6.4pp (from 5.0pp the quarter before). [1]</a:t>
             </a:r>
           </a:p>
           <a:p>
@@ -10372,7 +10404,7 @@
                   <a:srgbClr val="6B7385"/>
                 </a:solidFill>
               </a:rPr>
-              <a:t>Sets fresh pricing (yield) evidence for valuations and acquisitions.</a:t>
+              <a:t>Occupiers are concentrating on the best space: Grade A buildings let first while second-hand space waits. Supports Grade A rents and the case for refurbishment; raises the risk on older stock.</a:t>
             </a:r>
           </a:p>
         </p:txBody>
@@ -10395,15 +10427,15 @@
             <a:r>
               <a:rPr sz="900" b="1">
                 <a:solidFill>
-                  <a:srgbClr val="A8322A"/>
+                  <a:srgbClr val="2E7D4F"/>
                 </a:solidFill>
               </a:rPr>
-              <a:t>▼ NEGATIVE</a:t>
+              <a:t>▲ POSITIVE</a:t>
             </a:r>
             <a:r>
               <a:rPr sz="900">
                 <a:solidFill>
-                  <a:srgbClr val="A8322A"/>
+                  <a:srgbClr val="B4452E"/>
                 </a:solidFill>
               </a:rPr>
               <a:t/>
@@ -10417,13 +10449,13 @@
                 </a:solidFill>
                 <a:latin typeface="Cambria"/>
               </a:rPr>
-              <a:t>Investment sentiment hit by renewed interest rate volatility</a:t>
+              <a:t>Barclays buys 1 Churchill Place, Canary Wharf, for £750m</a:t>
             </a:r>
           </a:p>
           <a:p>
             <a:r>
               <a:rPr sz="900"/>
-              <a:t>London office investment edged up to £2.0bn in Q2 2026, but sentiment was affected by renewed interest rate volatility. [10]</a:t>
+              <a:t>Barclays has acquired its Canary Wharf headquarters at 1 Churchill Place for £750m, reflecting a 5.62% yield. The deal lifted Docklands &amp; Stratford investment turnover to… [10]</a:t>
             </a:r>
           </a:p>
           <a:p>
@@ -10464,7 +10496,7 @@
             <a:r>
               <a:rPr sz="900">
                 <a:solidFill>
-                  <a:srgbClr val="A8322A"/>
+                  <a:srgbClr val="B4452E"/>
                 </a:solidFill>
               </a:rPr>
               <a:t/>
@@ -10478,13 +10510,13 @@
                 </a:solidFill>
                 <a:latin typeface="Cambria"/>
               </a:rPr>
-              <a:t>City &amp; Southbank investment volume -77% vs long-term average</a:t>
+              <a:t>Investment sentiment hit by renewed interest rate volatility</a:t>
             </a:r>
           </a:p>
           <a:p>
             <a:r>
               <a:rPr sz="900"/>
-              <a:t>Investment volume in City &amp; Southbank was £0.37bn in Q2 2026 against a long-term average of £1.60bn. [1]</a:t>
+              <a:t>London office investment edged up to £2.0bn in Q2 2026, but sentiment was affected by renewed interest rate volatility. [10]</a:t>
             </a:r>
           </a:p>
           <a:p>
@@ -10494,7 +10526,7 @@
                   <a:srgbClr val="6B7385"/>
                 </a:solidFill>
               </a:rPr>
-              <a:t>Investment is well below trend: thin liquidity and little pricing evidence.</a:t>
+              <a:t>Sets fresh pricing (yield) evidence for valuations and acquisitions.</a:t>
             </a:r>
           </a:p>
         </p:txBody>
@@ -10517,15 +10549,15 @@
             <a:r>
               <a:rPr sz="900" b="1">
                 <a:solidFill>
-                  <a:srgbClr val="2E7D4F"/>
+                  <a:srgbClr val="A8322A"/>
                 </a:solidFill>
               </a:rPr>
-              <a:t>▲ POSITIVE</a:t>
+              <a:t>▼ NEGATIVE</a:t>
             </a:r>
             <a:r>
               <a:rPr sz="900">
                 <a:solidFill>
-                  <a:srgbClr val="A8322A"/>
+                  <a:srgbClr val="B4452E"/>
                 </a:solidFill>
               </a:rPr>
               <a:t/>
@@ -10539,13 +10571,13 @@
                 </a:solidFill>
                 <a:latin typeface="Cambria"/>
               </a:rPr>
-              <a:t>Docklands &amp; Stratford investment volume +525% vs long-term average</a:t>
+              <a:t>City &amp; Southbank investment volume -77% vs long-term average</a:t>
             </a:r>
           </a:p>
           <a:p>
             <a:r>
               <a:rPr sz="900"/>
-              <a:t>Investment volume in Docklands &amp; Stratford was £0.75bn in Q2 2026 against a long-term average of £0.12bn. [1]</a:t>
+              <a:t>Investment volume in City &amp; Southbank was £0.37bn in Q2 2026 against a long-term average of £1.60bn. [1]</a:t>
             </a:r>
           </a:p>
           <a:p>
@@ -10555,7 +10587,7 @@
                   <a:srgbClr val="6B7385"/>
                 </a:solidFill>
               </a:rPr>
-              <a:t>Investment is above trend: more pricing evidence and better liquidity.</a:t>
+              <a:t>Investment is well below trend: thin liquidity and little pricing evidence.</a:t>
             </a:r>
           </a:p>
         </p:txBody>
@@ -10578,15 +10610,15 @@
             <a:r>
               <a:rPr sz="900" b="1">
                 <a:solidFill>
-                  <a:srgbClr val="A8322A"/>
+                  <a:srgbClr val="2E7D4F"/>
                 </a:solidFill>
               </a:rPr>
-              <a:t>▼ NEGATIVE</a:t>
+              <a:t>▲ POSITIVE</a:t>
             </a:r>
             <a:r>
               <a:rPr sz="900">
                 <a:solidFill>
-                  <a:srgbClr val="A8322A"/>
+                  <a:srgbClr val="B4452E"/>
                 </a:solidFill>
               </a:rPr>
               <a:t/>
@@ -10600,13 +10632,13 @@
                 </a:solidFill>
                 <a:latin typeface="Cambria"/>
               </a:rPr>
-              <a:t>540,000 sq ft speculative scheme due Q4 2027 in Rest of Docklands</a:t>
+              <a:t>Docklands &amp; Stratford investment volume +525% vs long-term average</a:t>
             </a:r>
           </a:p>
           <a:p>
             <a:r>
               <a:rPr sz="900"/>
-              <a:t>One North Quay, E14 (540,000 sq ft) is under construction without a pre-let and is expected to complete in Q4 2027. [6]</a:t>
+              <a:t>Investment volume in Docklands &amp; Stratford was £0.75bn in Q2 2026 against a long-term average of £0.12bn. [1]</a:t>
             </a:r>
           </a:p>
           <a:p>
@@ -10616,7 +10648,7 @@
                   <a:srgbClr val="6B7385"/>
                 </a:solidFill>
               </a:rPr>
-              <a:t>New speculative space will compete for tenants with existing buildings nearby.</a:t>
+              <a:t>Investment is above trend: more pricing evidence and better liquidity.</a:t>
             </a:r>
           </a:p>
         </p:txBody>
@@ -10639,15 +10671,15 @@
             <a:r>
               <a:rPr sz="900" b="1">
                 <a:solidFill>
-                  <a:srgbClr val="2E7D4F"/>
+                  <a:srgbClr val="A8322A"/>
                 </a:solidFill>
               </a:rPr>
-              <a:t>▲ POSITIVE</a:t>
+              <a:t>▼ NEGATIVE</a:t>
             </a:r>
             <a:r>
               <a:rPr sz="900">
                 <a:solidFill>
-                  <a:srgbClr val="A8322A"/>
+                  <a:srgbClr val="B4452E"/>
                 </a:solidFill>
               </a:rPr>
               <a:t/>
@@ -10661,13 +10693,13 @@
                 </a:solidFill>
                 <a:latin typeface="Cambria"/>
               </a:rPr>
-              <a:t>Q4 2025 London office investment hits £3.3bn, best quarter since Q1 2022</a:t>
+              <a:t>540,000 sq ft speculative scheme due Q4 2027 in Rest of Docklands</a:t>
             </a:r>
           </a:p>
           <a:p>
             <a:r>
               <a:rPr sz="900"/>
-              <a:t>London office investment reached £3.3bn in Q4 2025 with a further £3.1bn under offer, the strongest quarter since Q1 2022. [11]</a:t>
+              <a:t>One North Quay, E14 (540,000 sq ft) is under construction without a pre-let and is expected to complete in Q4 2027. [6]</a:t>
             </a:r>
           </a:p>
           <a:p>
@@ -10677,7 +10709,7 @@
                   <a:srgbClr val="6B7385"/>
                 </a:solidFill>
               </a:rPr>
-              <a:t>Sets fresh pricing (yield) evidence for valuations and acquisitions.</a:t>
+              <a:t>New speculative space will compete for tenants with existing buildings nearby.</a:t>
             </a:r>
           </a:p>
         </p:txBody>
@@ -10740,7 +10772,7 @@
             <a:avLst/>
           </a:prstGeom>
           <a:solidFill>
-            <a:srgbClr val="A8322A"/>
+            <a:srgbClr val="2E7D4F"/>
           </a:solidFill>
           <a:ln>
             <a:noFill/>
@@ -10826,7 +10858,7 @@
             <a:avLst/>
           </a:prstGeom>
           <a:solidFill>
-            <a:srgbClr val="2E7D4F"/>
+            <a:srgbClr val="A8322A"/>
           </a:solidFill>
           <a:ln>
             <a:noFill/>
@@ -10869,7 +10901,7 @@
             <a:avLst/>
           </a:prstGeom>
           <a:solidFill>
-            <a:srgbClr val="A8322A"/>
+            <a:srgbClr val="2E7D4F"/>
           </a:solidFill>
           <a:ln>
             <a:noFill/>
@@ -10912,7 +10944,7 @@
             <a:avLst/>
           </a:prstGeom>
           <a:solidFill>
-            <a:srgbClr val="2E7D4F"/>
+            <a:srgbClr val="A8322A"/>
           </a:solidFill>
           <a:ln>
             <a:noFill/>
@@ -11046,7 +11078,12 @@
             <p:ph type="body" idx="105"/>
           </p:nvPr>
         </p:nvSpPr>
-        <p:spPr/>
+        <p:spPr>
+          <a:xfrm>
+            <a:off x="548640" y="1645920"/>
+            <a:ext cx="11064240" cy="4389120"/>
+          </a:xfrm>
+        </p:spPr>
         <p:txBody>
           <a:bodyPr wrap="square"/>
           <a:lstStyle/>
@@ -11113,12 +11150,6 @@
           <a:p>
             <a:r>
               <a:rPr/>
-              <a:t>[11] Knight Frank research (seed) (2025-12-31) - https://www.knightfrank.co.uk/site-assets/research/report-pdfs/spotlight/spotlight-q4-2025-2.pdf</a:t>
-            </a:r>
-          </a:p>
-          <a:p>
-            <a:r>
-              <a:rPr/>
               <a:t/>
             </a:r>
           </a:p>
@@ -11132,21 +11163,239 @@
               <a:t>Figures restated from public research for this proof of concept (Knight Frank terms bar AI use of their data); verify against the original before external use.</a:t>
             </a:r>
           </a:p>
-          <a:p>
-            <a:r>
-              <a:rPr>
+        </p:txBody>
+      </p:sp>
+      <p:sp>
+        <p:nvSpPr>
+          <p:cNvPr id="5" name="tier dot open"/>
+          <p:cNvSpPr/>
+          <p:nvPr/>
+        </p:nvSpPr>
+        <p:spPr>
+          <a:xfrm>
+            <a:off x="548640" y="6227064"/>
+            <a:ext cx="88900" cy="88900"/>
+          </a:xfrm>
+          <a:prstGeom prst="ellipse">
+            <a:avLst/>
+          </a:prstGeom>
+          <a:solidFill>
+            <a:srgbClr val="2E7D55"/>
+          </a:solidFill>
+          <a:ln>
+            <a:noFill/>
+          </a:ln>
+        </p:spPr>
+        <p:style>
+          <a:lnRef idx="1">
+            <a:schemeClr val="accent1"/>
+          </a:lnRef>
+          <a:fillRef idx="3">
+            <a:schemeClr val="accent1"/>
+          </a:fillRef>
+          <a:effectRef idx="2">
+            <a:schemeClr val="accent1"/>
+          </a:effectRef>
+          <a:fontRef idx="minor">
+            <a:schemeClr val="lt1"/>
+          </a:fontRef>
+        </p:style>
+        <p:txBody>
+          <a:bodyPr rtlCol="0" anchor="ctr"/>
+          <a:lstStyle/>
+          <a:p>
+            <a:pPr algn="ctr"/>
+          </a:p>
+        </p:txBody>
+      </p:sp>
+      <p:sp>
+        <p:nvSpPr>
+          <p:cNvPr id="6" name="TextBox 5"/>
+          <p:cNvSpPr txBox="1"/>
+          <p:nvPr/>
+        </p:nvSpPr>
+        <p:spPr>
+          <a:xfrm>
+            <a:off x="675640" y="6144768"/>
+            <a:ext cx="2138679" cy="228600"/>
+          </a:xfrm>
+          <a:prstGeom prst="rect">
+            <a:avLst/>
+          </a:prstGeom>
+          <a:noFill/>
+        </p:spPr>
+        <p:txBody>
+          <a:bodyPr wrap="square" lIns="0" rIns="0">
+            <a:spAutoFit/>
+          </a:bodyPr>
+          <a:lstStyle/>
+          <a:p>
+            <a:r>
+              <a:rPr sz="900">
                 <a:solidFill>
                   <a:srgbClr val="6B7385"/>
                 </a:solidFill>
               </a:rPr>
-              <a:t>🟢 collected automatically from open data · 🟠 uploaded by a colleague under the team's own access</a:t>
-            </a:r>
-          </a:p>
-        </p:txBody>
-      </p:sp>
-      <p:sp>
-        <p:nvSpPr>
-          <p:cNvPr id="5" name="TextBox 4"/>
+              <a:t>Open data, collected automatically</a:t>
+            </a:r>
+          </a:p>
+        </p:txBody>
+      </p:sp>
+      <p:sp>
+        <p:nvSpPr>
+          <p:cNvPr id="7" name="tier dot uploaded"/>
+          <p:cNvSpPr/>
+          <p:nvPr/>
+        </p:nvSpPr>
+        <p:spPr>
+          <a:xfrm>
+            <a:off x="2997199" y="6227064"/>
+            <a:ext cx="88900" cy="88900"/>
+          </a:xfrm>
+          <a:prstGeom prst="ellipse">
+            <a:avLst/>
+          </a:prstGeom>
+          <a:solidFill>
+            <a:srgbClr val="B9781A"/>
+          </a:solidFill>
+          <a:ln>
+            <a:noFill/>
+          </a:ln>
+        </p:spPr>
+        <p:style>
+          <a:lnRef idx="1">
+            <a:schemeClr val="accent1"/>
+          </a:lnRef>
+          <a:fillRef idx="3">
+            <a:schemeClr val="accent1"/>
+          </a:fillRef>
+          <a:effectRef idx="2">
+            <a:schemeClr val="accent1"/>
+          </a:effectRef>
+          <a:fontRef idx="minor">
+            <a:schemeClr val="lt1"/>
+          </a:fontRef>
+        </p:style>
+        <p:txBody>
+          <a:bodyPr rtlCol="0" anchor="ctr"/>
+          <a:lstStyle/>
+          <a:p>
+            <a:pPr algn="ctr"/>
+          </a:p>
+        </p:txBody>
+      </p:sp>
+      <p:sp>
+        <p:nvSpPr>
+          <p:cNvPr id="8" name="TextBox 7"/>
+          <p:cNvSpPr txBox="1"/>
+          <p:nvPr/>
+        </p:nvSpPr>
+        <p:spPr>
+          <a:xfrm>
+            <a:off x="3124199" y="6144768"/>
+            <a:ext cx="3131820" cy="228600"/>
+          </a:xfrm>
+          <a:prstGeom prst="rect">
+            <a:avLst/>
+          </a:prstGeom>
+          <a:noFill/>
+        </p:spPr>
+        <p:txBody>
+          <a:bodyPr wrap="square" lIns="0" rIns="0">
+            <a:spAutoFit/>
+          </a:bodyPr>
+          <a:lstStyle/>
+          <a:p>
+            <a:r>
+              <a:rPr sz="900">
+                <a:solidFill>
+                  <a:srgbClr val="6B7385"/>
+                </a:solidFill>
+              </a:rPr>
+              <a:t>Uploaded by a colleague under the team's own access</a:t>
+            </a:r>
+          </a:p>
+        </p:txBody>
+      </p:sp>
+      <p:sp>
+        <p:nvSpPr>
+          <p:cNvPr id="9" name="tier dot internal"/>
+          <p:cNvSpPr/>
+          <p:nvPr/>
+        </p:nvSpPr>
+        <p:spPr>
+          <a:xfrm>
+            <a:off x="6438899" y="6227064"/>
+            <a:ext cx="88900" cy="88900"/>
+          </a:xfrm>
+          <a:prstGeom prst="ellipse">
+            <a:avLst/>
+          </a:prstGeom>
+          <a:solidFill>
+            <a:srgbClr val="2F6FBF"/>
+          </a:solidFill>
+          <a:ln>
+            <a:noFill/>
+          </a:ln>
+        </p:spPr>
+        <p:style>
+          <a:lnRef idx="1">
+            <a:schemeClr val="accent1"/>
+          </a:lnRef>
+          <a:fillRef idx="3">
+            <a:schemeClr val="accent1"/>
+          </a:fillRef>
+          <a:effectRef idx="2">
+            <a:schemeClr val="accent1"/>
+          </a:effectRef>
+          <a:fontRef idx="minor">
+            <a:schemeClr val="lt1"/>
+          </a:fontRef>
+        </p:style>
+        <p:txBody>
+          <a:bodyPr rtlCol="0" anchor="ctr"/>
+          <a:lstStyle/>
+          <a:p>
+            <a:pPr algn="ctr"/>
+          </a:p>
+        </p:txBody>
+      </p:sp>
+      <p:sp>
+        <p:nvSpPr>
+          <p:cNvPr id="10" name="TextBox 9"/>
+          <p:cNvSpPr txBox="1"/>
+          <p:nvPr/>
+        </p:nvSpPr>
+        <p:spPr>
+          <a:xfrm>
+            <a:off x="6565899" y="6144768"/>
+            <a:ext cx="1612899" cy="228600"/>
+          </a:xfrm>
+          <a:prstGeom prst="rect">
+            <a:avLst/>
+          </a:prstGeom>
+          <a:noFill/>
+        </p:spPr>
+        <p:txBody>
+          <a:bodyPr wrap="square" lIns="0" rIns="0">
+            <a:spAutoFit/>
+          </a:bodyPr>
+          <a:lstStyle/>
+          <a:p>
+            <a:r>
+              <a:rPr sz="900">
+                <a:solidFill>
+                  <a:srgbClr val="6B7385"/>
+                </a:solidFill>
+              </a:rPr>
+              <a:t>Internal, our own records</a:t>
+            </a:r>
+          </a:p>
+        </p:txBody>
+      </p:sp>
+      <p:sp>
+        <p:nvSpPr>
+          <p:cNvPr id="11" name="TextBox 10"/>
           <p:cNvSpPr txBox="1"/>
           <p:nvPr/>
         </p:nvSpPr>

--- a/docs/samples/team-brief-board-sample.pptx
+++ b/docs/samples/team-brief-board-sample.pptx
@@ -8790,7 +8790,7 @@
           <a:p>
             <a:r>
               <a:rPr/>
-              <a:t>LONDON OFFICE MARKET  ·  10 OCT 2026</a:t>
+              <a:t>LONDON OFFICE MARKET  ·  11 OCT 2026</a:t>
             </a:r>
           </a:p>
         </p:txBody>
@@ -8834,7 +8834,7 @@
           <a:p>
             <a:r>
               <a:rPr/>
-              <a:t>Board brief  ·  figures to Q2 2026  ·  10 Oct 2026</a:t>
+              <a:t>Board brief  ·  figures to Q2 2026  ·  11 Oct 2026</a:t>
             </a:r>
           </a:p>
         </p:txBody>
@@ -9147,6 +9147,30 @@
           </a:p>
         </p:txBody>
       </p:sp>
+      <p:pic>
+        <p:nvPicPr>
+          <p:cNvPr id="11" name="co-brand" descr="cobrand-nanfung-on-dark@2x.png"/>
+          <p:cNvPicPr>
+            <a:picLocks noChangeAspect="1"/>
+          </p:cNvPicPr>
+          <p:nvPr/>
+        </p:nvPicPr>
+        <p:blipFill>
+          <a:blip r:embed="rId2"/>
+          <a:stretch>
+            <a:fillRect/>
+          </a:stretch>
+        </p:blipFill>
+        <p:spPr>
+          <a:xfrm>
+            <a:off x="8457914" y="347472"/>
+            <a:ext cx="3203734" cy="566928"/>
+          </a:xfrm>
+          <a:prstGeom prst="rect">
+            <a:avLst/>
+          </a:prstGeom>
+        </p:spPr>
+      </p:pic>
     </p:spTree>
   </p:cSld>
   <p:clrMapOvr>
@@ -9247,7 +9271,7 @@
         </p:xfrm>
         <a:graphic>
           <a:graphicData uri="http://schemas.openxmlformats.org/drawingml/2006/chart">
-            <c:chart xmlns:c="http://schemas.openxmlformats.org/drawingml/2006/chart" r:id="rId2"/>
+            <c:chart xmlns:c="http://schemas.openxmlformats.org/drawingml/2006/chart" r:id="rId3"/>
           </a:graphicData>
         </a:graphic>
       </p:graphicFrame>
@@ -9289,7 +9313,7 @@
         </p:xfrm>
         <a:graphic>
           <a:graphicData uri="http://schemas.openxmlformats.org/drawingml/2006/chart">
-            <c:chart xmlns:c="http://schemas.openxmlformats.org/drawingml/2006/chart" r:id="rId3"/>
+            <c:chart xmlns:c="http://schemas.openxmlformats.org/drawingml/2006/chart" r:id="rId4"/>
           </a:graphicData>
         </a:graphic>
       </p:graphicFrame>
@@ -9315,9 +9339,33 @@
           </a:p>
         </p:txBody>
       </p:sp>
-      <p:sp>
-        <p:nvSpPr>
-          <p:cNvPr id="9" name="Rectangle 8"/>
+      <p:pic>
+        <p:nvPicPr>
+          <p:cNvPr id="9" name="app icon" descr="app-icon-1024.png"/>
+          <p:cNvPicPr>
+            <a:picLocks noChangeAspect="1"/>
+          </p:cNvPicPr>
+          <p:nvPr/>
+        </p:nvPicPr>
+        <p:blipFill>
+          <a:blip r:embed="rId2"/>
+          <a:stretch>
+            <a:fillRect/>
+          </a:stretch>
+        </p:blipFill>
+        <p:spPr>
+          <a:xfrm>
+            <a:off x="10607040" y="6455664"/>
+            <a:ext cx="274320" cy="274320"/>
+          </a:xfrm>
+          <a:prstGeom prst="rect">
+            <a:avLst/>
+          </a:prstGeom>
+        </p:spPr>
+      </p:pic>
+      <p:sp>
+        <p:nvSpPr>
+          <p:cNvPr id="10" name="Rectangle 9"/>
           <p:cNvSpPr/>
           <p:nvPr/>
         </p:nvSpPr>
@@ -9376,7 +9424,7 @@
       </p:sp>
       <p:sp>
         <p:nvSpPr>
-          <p:cNvPr id="10" name="TextBox 9"/>
+          <p:cNvPr id="11" name="TextBox 10"/>
           <p:cNvSpPr txBox="1"/>
           <p:nvPr/>
         </p:nvSpPr>
@@ -9508,7 +9556,7 @@
         </p:xfrm>
         <a:graphic>
           <a:graphicData uri="http://schemas.openxmlformats.org/drawingml/2006/chart">
-            <c:chart xmlns:c="http://schemas.openxmlformats.org/drawingml/2006/chart" r:id="rId2"/>
+            <c:chart xmlns:c="http://schemas.openxmlformats.org/drawingml/2006/chart" r:id="rId3"/>
           </a:graphicData>
         </a:graphic>
       </p:graphicFrame>
@@ -9556,9 +9604,33 @@
           </a:p>
         </p:txBody>
       </p:sp>
+      <p:pic>
+        <p:nvPicPr>
+          <p:cNvPr id="9" name="app icon" descr="app-icon-1024.png"/>
+          <p:cNvPicPr>
+            <a:picLocks noChangeAspect="1"/>
+          </p:cNvPicPr>
+          <p:nvPr/>
+        </p:nvPicPr>
+        <p:blipFill>
+          <a:blip r:embed="rId2"/>
+          <a:stretch>
+            <a:fillRect/>
+          </a:stretch>
+        </p:blipFill>
+        <p:spPr>
+          <a:xfrm>
+            <a:off x="10607040" y="6455664"/>
+            <a:ext cx="274320" cy="274320"/>
+          </a:xfrm>
+          <a:prstGeom prst="rect">
+            <a:avLst/>
+          </a:prstGeom>
+        </p:spPr>
+      </p:pic>
       <p:graphicFrame>
         <p:nvGraphicFramePr>
-          <p:cNvPr id="9" name="Table 8"/>
+          <p:cNvPr id="10" name="Table 9"/>
           <p:cNvGraphicFramePr>
             <a:graphicFrameLocks noGrp="1"/>
           </p:cNvGraphicFramePr>
@@ -9910,7 +9982,7 @@
       </p:graphicFrame>
       <p:sp>
         <p:nvSpPr>
-          <p:cNvPr id="10" name="Rectangle 9"/>
+          <p:cNvPr id="11" name="Rectangle 10"/>
           <p:cNvSpPr/>
           <p:nvPr/>
         </p:nvSpPr>
@@ -9969,7 +10041,7 @@
       </p:sp>
       <p:sp>
         <p:nvSpPr>
-          <p:cNvPr id="11" name="TextBox 10"/>
+          <p:cNvPr id="12" name="TextBox 11"/>
           <p:cNvSpPr txBox="1"/>
           <p:nvPr/>
         </p:nvSpPr>
@@ -10167,7 +10239,7 @@
         </p:xfrm>
         <a:graphic>
           <a:graphicData uri="http://schemas.openxmlformats.org/drawingml/2006/chart">
-            <c:chart xmlns:c="http://schemas.openxmlformats.org/drawingml/2006/chart" r:id="rId2"/>
+            <c:chart xmlns:c="http://schemas.openxmlformats.org/drawingml/2006/chart" r:id="rId3"/>
           </a:graphicData>
         </a:graphic>
       </p:graphicFrame>
@@ -10193,9 +10265,33 @@
           </a:p>
         </p:txBody>
       </p:sp>
-      <p:sp>
-        <p:nvSpPr>
-          <p:cNvPr id="10" name="Rectangle 9"/>
+      <p:pic>
+        <p:nvPicPr>
+          <p:cNvPr id="10" name="app icon" descr="app-icon-1024.png"/>
+          <p:cNvPicPr>
+            <a:picLocks noChangeAspect="1"/>
+          </p:cNvPicPr>
+          <p:nvPr/>
+        </p:nvPicPr>
+        <p:blipFill>
+          <a:blip r:embed="rId2"/>
+          <a:stretch>
+            <a:fillRect/>
+          </a:stretch>
+        </p:blipFill>
+        <p:spPr>
+          <a:xfrm>
+            <a:off x="10607040" y="6455664"/>
+            <a:ext cx="274320" cy="274320"/>
+          </a:xfrm>
+          <a:prstGeom prst="rect">
+            <a:avLst/>
+          </a:prstGeom>
+        </p:spPr>
+      </p:pic>
+      <p:sp>
+        <p:nvSpPr>
+          <p:cNvPr id="11" name="Rectangle 10"/>
           <p:cNvSpPr/>
           <p:nvPr/>
         </p:nvSpPr>
@@ -10254,7 +10350,7 @@
       </p:sp>
       <p:sp>
         <p:nvSpPr>
-          <p:cNvPr id="11" name="TextBox 10"/>
+          <p:cNvPr id="12" name="TextBox 11"/>
           <p:cNvSpPr txBox="1"/>
           <p:nvPr/>
         </p:nvSpPr>
@@ -10714,9 +10810,33 @@
           </a:p>
         </p:txBody>
       </p:sp>
-      <p:sp>
-        <p:nvSpPr>
-          <p:cNvPr id="11" name="Rectangle 10"/>
+      <p:pic>
+        <p:nvPicPr>
+          <p:cNvPr id="11" name="app icon" descr="app-icon-1024.png"/>
+          <p:cNvPicPr>
+            <a:picLocks noChangeAspect="1"/>
+          </p:cNvPicPr>
+          <p:nvPr/>
+        </p:nvPicPr>
+        <p:blipFill>
+          <a:blip r:embed="rId2"/>
+          <a:stretch>
+            <a:fillRect/>
+          </a:stretch>
+        </p:blipFill>
+        <p:spPr>
+          <a:xfrm>
+            <a:off x="10607040" y="6455664"/>
+            <a:ext cx="274320" cy="274320"/>
+          </a:xfrm>
+          <a:prstGeom prst="rect">
+            <a:avLst/>
+          </a:prstGeom>
+        </p:spPr>
+      </p:pic>
+      <p:sp>
+        <p:nvSpPr>
+          <p:cNvPr id="12" name="Rectangle 11"/>
           <p:cNvSpPr/>
           <p:nvPr/>
         </p:nvSpPr>
@@ -10759,7 +10879,7 @@
       </p:sp>
       <p:sp>
         <p:nvSpPr>
-          <p:cNvPr id="12" name="Rectangle 11"/>
+          <p:cNvPr id="13" name="Rectangle 12"/>
           <p:cNvSpPr/>
           <p:nvPr/>
         </p:nvSpPr>
@@ -10802,7 +10922,7 @@
       </p:sp>
       <p:sp>
         <p:nvSpPr>
-          <p:cNvPr id="13" name="Rectangle 12"/>
+          <p:cNvPr id="14" name="Rectangle 13"/>
           <p:cNvSpPr/>
           <p:nvPr/>
         </p:nvSpPr>
@@ -10845,7 +10965,7 @@
       </p:sp>
       <p:sp>
         <p:nvSpPr>
-          <p:cNvPr id="14" name="Rectangle 13"/>
+          <p:cNvPr id="15" name="Rectangle 14"/>
           <p:cNvSpPr/>
           <p:nvPr/>
         </p:nvSpPr>
@@ -10888,7 +11008,7 @@
       </p:sp>
       <p:sp>
         <p:nvSpPr>
-          <p:cNvPr id="15" name="Rectangle 14"/>
+          <p:cNvPr id="16" name="Rectangle 15"/>
           <p:cNvSpPr/>
           <p:nvPr/>
         </p:nvSpPr>
@@ -10931,7 +11051,7 @@
       </p:sp>
       <p:sp>
         <p:nvSpPr>
-          <p:cNvPr id="16" name="Rectangle 15"/>
+          <p:cNvPr id="17" name="Rectangle 16"/>
           <p:cNvSpPr/>
           <p:nvPr/>
         </p:nvSpPr>
@@ -10974,7 +11094,7 @@
       </p:sp>
       <p:sp>
         <p:nvSpPr>
-          <p:cNvPr id="17" name="TextBox 16"/>
+          <p:cNvPr id="18" name="TextBox 17"/>
           <p:cNvSpPr txBox="1"/>
           <p:nvPr/>
         </p:nvSpPr>
@@ -11090,7 +11210,7 @@
           <a:p>
             <a:r>
               <a:rPr/>
-              <a:t>[1] London Offices Spotlight Q2 2026 (Uploaded by PoC seed · 2026-10-10) - https://www.knightfrank.co.uk/site-assets/research/report-pdfs/london-office-spotlight/spotlight-q2-2026.pdf</a:t>
+              <a:t>[1] London Offices Spotlight Q2 2026 (Uploaded by PoC seed · 2026-10-11) - https://www.knightfrank.co.uk/site-assets/research/report-pdfs/london-office-spotlight/spotlight-q2-2026.pdf</a:t>
             </a:r>
           </a:p>
           <a:p>
@@ -11102,43 +11222,43 @@
           <a:p>
             <a:r>
               <a:rPr/>
-              <a:t>[3] The London Office Market Report Q1 2024 (Uploaded by PoC seed · 2026-10-10) - https://content.knightfrank.com/research/104/documents/en/the-london-office-market-report-q1-2024-11170.pdf</a:t>
+              <a:t>[3] The London Office Market Report Q1 2024 (Uploaded by PoC seed · 2026-10-11) - https://content.knightfrank.com/research/104/documents/en/the-london-office-market-report-q1-2024-11170.pdf</a:t>
             </a:r>
           </a:p>
           <a:p>
             <a:r>
               <a:rPr/>
-              <a:t>[4] London Offices Spotlight Q2 2024 (Uploaded by PoC seed · 2026-10-10) - https://content.knightfrank.com/research/1903/documents/en/london-offices-spotlight-q2-2024-11338.pdf</a:t>
+              <a:t>[4] London Offices Spotlight Q2 2024 (Uploaded by PoC seed · 2026-10-11) - https://content.knightfrank.com/research/1903/documents/en/london-offices-spotlight-q2-2024-11338.pdf</a:t>
             </a:r>
           </a:p>
           <a:p>
             <a:r>
               <a:rPr/>
-              <a:t>[5] The London Office Market Report Q3 2024 (Uploaded by PoC seed · 2026-10-10) - https://www.knightfrank.co.uk/research/reports/the-london-office-market-report-104/contentassets/the-london-office-market-report-q3-2024-11701.pdf</a:t>
+              <a:t>[5] The London Office Market Report Q3 2024 (Uploaded by PoC seed · 2026-10-11) - https://www.knightfrank.co.uk/research/reports/the-london-office-market-report-104/contentassets/the-london-office-market-report-q3-2024-11701.pdf</a:t>
             </a:r>
           </a:p>
           <a:p>
             <a:r>
               <a:rPr/>
-              <a:t>[6] The London Office Market Report Q2 2025 (Uploaded by PoC seed · 2026-10-10) - https://content.knightfrank.com/research/104/documents/en/the-london-office-market-report-q2-2025-12541.pdf</a:t>
+              <a:t>[6] The London Office Market Report Q2 2025 (Uploaded by PoC seed · 2026-10-11) - https://content.knightfrank.com/research/104/documents/en/the-london-office-market-report-q2-2025-12541.pdf</a:t>
             </a:r>
           </a:p>
           <a:p>
             <a:r>
               <a:rPr/>
-              <a:t>[7] London Offices Spotlight Q3 2025 (Uploaded by PoC seed · 2026-10-10) - https://content.knightfrank.com/research/1903/documents/en/london-offices-spotlight-q3-2025-12540.pdf</a:t>
+              <a:t>[7] London Offices Spotlight Q3 2025 (Uploaded by PoC seed · 2026-10-11) - https://content.knightfrank.com/research/1903/documents/en/london-offices-spotlight-q3-2025-12540.pdf</a:t>
             </a:r>
           </a:p>
           <a:p>
             <a:r>
               <a:rPr/>
-              <a:t>[8] London Offices Spotlight Q4 2025 (Uploaded by PoC seed · 2026-10-10) - https://www.knightfrank.co.uk/site-assets/research/report-pdfs/spotlight/spotlight-q4-2025-2.pdf</a:t>
+              <a:t>[8] London Offices Spotlight Q4 2025 (Uploaded by PoC seed · 2026-10-11) - https://www.knightfrank.co.uk/site-assets/research/report-pdfs/spotlight/spotlight-q4-2025-2.pdf</a:t>
             </a:r>
           </a:p>
           <a:p>
             <a:r>
               <a:rPr/>
-              <a:t>[9] London Offices Spotlight Q1 2026 (Uploaded by PoC seed · 2026-10-10) - https://www.knightfrank.co.uk/site-assets/research/report-pdfs/london-office-spotlight/spotlight-q1-2026v3.pdf</a:t>
+              <a:t>[9] London Offices Spotlight Q1 2026 (Uploaded by PoC seed · 2026-10-11) - https://www.knightfrank.co.uk/site-assets/research/report-pdfs/london-office-spotlight/spotlight-q1-2026v3.pdf</a:t>
             </a:r>
           </a:p>
           <a:p>
@@ -11165,9 +11285,33 @@
           </a:p>
         </p:txBody>
       </p:sp>
-      <p:sp>
-        <p:nvSpPr>
-          <p:cNvPr id="5" name="tier dot open"/>
+      <p:pic>
+        <p:nvPicPr>
+          <p:cNvPr id="5" name="app icon" descr="app-icon-1024.png"/>
+          <p:cNvPicPr>
+            <a:picLocks noChangeAspect="1"/>
+          </p:cNvPicPr>
+          <p:nvPr/>
+        </p:nvPicPr>
+        <p:blipFill>
+          <a:blip r:embed="rId2"/>
+          <a:stretch>
+            <a:fillRect/>
+          </a:stretch>
+        </p:blipFill>
+        <p:spPr>
+          <a:xfrm>
+            <a:off x="10607040" y="6455664"/>
+            <a:ext cx="274320" cy="274320"/>
+          </a:xfrm>
+          <a:prstGeom prst="rect">
+            <a:avLst/>
+          </a:prstGeom>
+        </p:spPr>
+      </p:pic>
+      <p:sp>
+        <p:nvSpPr>
+          <p:cNvPr id="6" name="tier dot open"/>
           <p:cNvSpPr/>
           <p:nvPr/>
         </p:nvSpPr>
@@ -11210,7 +11354,7 @@
       </p:sp>
       <p:sp>
         <p:nvSpPr>
-          <p:cNvPr id="6" name="TextBox 5"/>
+          <p:cNvPr id="7" name="TextBox 6"/>
           <p:cNvSpPr txBox="1"/>
           <p:nvPr/>
         </p:nvSpPr>
@@ -11243,7 +11387,7 @@
       </p:sp>
       <p:sp>
         <p:nvSpPr>
-          <p:cNvPr id="7" name="tier dot uploaded"/>
+          <p:cNvPr id="8" name="tier dot uploaded"/>
           <p:cNvSpPr/>
           <p:nvPr/>
         </p:nvSpPr>
@@ -11286,7 +11430,7 @@
       </p:sp>
       <p:sp>
         <p:nvSpPr>
-          <p:cNvPr id="8" name="TextBox 7"/>
+          <p:cNvPr id="9" name="TextBox 8"/>
           <p:cNvSpPr txBox="1"/>
           <p:nvPr/>
         </p:nvSpPr>
@@ -11319,7 +11463,7 @@
       </p:sp>
       <p:sp>
         <p:nvSpPr>
-          <p:cNvPr id="9" name="tier dot internal"/>
+          <p:cNvPr id="10" name="tier dot internal"/>
           <p:cNvSpPr/>
           <p:nvPr/>
         </p:nvSpPr>
@@ -11362,7 +11506,7 @@
       </p:sp>
       <p:sp>
         <p:nvSpPr>
-          <p:cNvPr id="10" name="TextBox 9"/>
+          <p:cNvPr id="11" name="TextBox 10"/>
           <p:cNvSpPr txBox="1"/>
           <p:nvPr/>
         </p:nvSpPr>
@@ -11395,7 +11539,7 @@
       </p:sp>
       <p:sp>
         <p:nvSpPr>
-          <p:cNvPr id="11" name="TextBox 10"/>
+          <p:cNvPr id="12" name="TextBox 11"/>
           <p:cNvSpPr txBox="1"/>
           <p:nvPr/>
         </p:nvSpPr>
